--- a/PPTs/Ch2_Data_Representation_Exercises.pptx
+++ b/PPTs/Ch2_Data_Representation_Exercises.pptx
@@ -5274,7 +5274,7 @@
           <a:p>
             <a:r>
               <a:rPr lang="en-US" dirty="0"/>
-              <a:t>Spring 2026</a:t>
+              <a:t>Fall 2026</a:t>
             </a:r>
           </a:p>
         </p:txBody>
@@ -5485,11 +5485,11 @@
           <a:p>
             <a:r>
               <a:rPr lang="en-US" dirty="0"/>
-              <a:t>Q: Q: Consider a 4-bit system. What is the result of subtraction 1011-0110, assuming either unsigned integers, or signed integers</a:t>
+              <a:t>Q: Consider a 4-bit system. What is the result of subtraction 1011-0110, assuming either unsigned integers, or signed integers</a:t>
             </a:r>
             <a:r>
               <a:rPr lang="en-US" altLang="zh-CN" dirty="0"/>
-              <a:t> </a:t>
+              <a:t xml:space="preserve"> </a:t>
             </a:r>
             <a:r>
               <a:rPr lang="en-US" dirty="0"/>
@@ -5722,13 +5722,13 @@
           <a:p>
             <a:r>
               <a:rPr lang="en-US" dirty="0"/>
-              <a:t>1. Overflow is impossible when subtracting one unsigned number from another.</a:t>
+              <a:t>1. Borrow=1 is impossible when subtracting one unsigned number from another.</a:t>
             </a:r>
           </a:p>
           <a:p>
             <a:r>
               <a:rPr lang="en-US" dirty="0"/>
-              <a:t>2. Overflow is impossible when subtracting two signed operands of the same sign.</a:t>
+              <a:t>2. Overflow=1 is impossible when subtracting two signed operands of the same sign.</a:t>
             </a:r>
           </a:p>
           <a:p>
@@ -5740,7 +5740,7 @@
           <a:p>
             <a:r>
               <a:rPr lang="en-US" dirty="0"/>
-              <a:t>4. In 2’s complement, the absolute values of full-scale negative and full-scale positive are identical</a:t>
+              <a:t>4. In 2’s complement, the absolute values of smallest negative and largest positive numbers are identical.</a:t>
             </a:r>
           </a:p>
         </p:txBody>
@@ -5902,7 +5902,7 @@
           <a:p>
             <a:r>
               <a:rPr lang="en-US" dirty="0"/>
-              <a:t>For each of the following binary numbers, give the corresponding binary number of the negative of its value, for 2’s-complement system</a:t>
+              <a:t>For each of the following binary numbers, give the corresponding binary number of its negation, for an 8-bit system, with 2’s-complement representation.</a:t>
             </a:r>
           </a:p>
           <a:p>
@@ -7248,7 +7248,7 @@
                       <a:pPr algn="ctr"/>
                       <a:r>
                         <a:rPr lang="en-US" sz="1800" dirty="0"/>
-                        <a:t>-32 … 31</a:t>
+                        <a:t>0 … 63</a:t>
                       </a:r>
                     </a:p>
                   </a:txBody>
